--- a/files/inst414_spring2026/lectures/lecture_8c_splitting_criteria.pptx
+++ b/files/inst414_spring2026/lectures/lecture_8c_splitting_criteria.pptx
@@ -3481,7 +3481,7 @@
         </p:spPr>
         <p:txBody>
           <a:bodyPr>
-            <a:normAutofit fontScale="92500"/>
+            <a:normAutofit fontScale="92500" lnSpcReduction="20000"/>
           </a:bodyPr>
           <a:lstStyle/>
           <a:p>
@@ -3505,7 +3505,7 @@
             </a:pPr>
             <a:r>
               <a:rPr lang="en-US" dirty="0"/>
-              <a:t>Measures how well a potential split (variable and threshold) separate the 0s from the 1s. Smaller values mean does better job separating.</a:t>
+              <a:t>Measures how well a potential split (variable and threshold) separate the 0s from the 1s. Smaller values mean it does better job separating.</a:t>
             </a:r>
           </a:p>
           <a:p>
@@ -5365,8 +5365,8 @@
           </a:p>
         </p:txBody>
       </p:sp>
-      <mc:AlternateContent xmlns:mc="http://schemas.openxmlformats.org/markup-compatibility/2006" xmlns:a14="http://schemas.microsoft.com/office/drawing/2010/main">
-        <mc:Choice Requires="a14">
+      <mc:AlternateContent xmlns:mc="http://schemas.openxmlformats.org/markup-compatibility/2006">
+        <mc:Choice xmlns:a14="http://schemas.microsoft.com/office/drawing/2010/main" Requires="a14">
           <p:sp>
             <p:nvSpPr>
               <p:cNvPr id="3" name="Content Placeholder 2">
@@ -5400,7 +5400,15 @@
                 </a:pPr>
                 <a:r>
                   <a:rPr lang="en-US" dirty="0"/>
-                  <a:t>Smaller values of Gini Impurity mean does better job separating.</a:t>
+                  <a:t>Smaller values of Gini Impurity </a:t>
+                </a:r>
+                <a:r>
+                  <a:rPr lang="en-US"/>
+                  <a:t>mean it </a:t>
+                </a:r>
+                <a:r>
+                  <a:rPr lang="en-US" dirty="0"/>
+                  <a:t>does better job separating.</a:t>
                 </a:r>
               </a:p>
               <a:p>
@@ -5583,7 +5591,7 @@
             </p:txBody>
           </p:sp>
         </mc:Choice>
-        <mc:Fallback xmlns="">
+        <mc:Fallback>
           <p:sp>
             <p:nvSpPr>
               <p:cNvPr id="3" name="Content Placeholder 2">
@@ -5608,7 +5616,7 @@
               <a:blipFill>
                 <a:blip r:embed="rId2"/>
                 <a:stretch>
-                  <a:fillRect t="-1852" r="-664"/>
+                  <a:fillRect t="-1852" r="-1898"/>
                 </a:stretch>
               </a:blipFill>
             </p:spPr>
